--- a/notes/experiment_flow.pptx
+++ b/notes/experiment_flow.pptx
@@ -3322,6 +3322,36 @@
           <a:chExt cx="0" cy="0"/>
         </a:xfrm>
       </p:grpSpPr>
+      <p:pic>
+        <p:nvPicPr>
+          <p:cNvPr id="6" name="Picture 5">
+            <a:extLst>
+              <a:ext uri="{FF2B5EF4-FFF2-40B4-BE49-F238E27FC236}">
+                <a16:creationId xmlns:a16="http://schemas.microsoft.com/office/drawing/2014/main" id="{79FD18D8-6672-565A-F77A-033363425AE2}"/>
+              </a:ext>
+            </a:extLst>
+          </p:cNvPr>
+          <p:cNvPicPr>
+            <a:picLocks noChangeAspect="1"/>
+          </p:cNvPicPr>
+          <p:nvPr/>
+        </p:nvPicPr>
+        <p:blipFill>
+          <a:blip r:embed="rId2"/>
+          <a:stretch>
+            <a:fillRect/>
+          </a:stretch>
+        </p:blipFill>
+        <p:spPr>
+          <a:xfrm>
+            <a:off x="640080" y="393786"/>
+            <a:ext cx="11076680" cy="4665894"/>
+          </a:xfrm>
+          <a:prstGeom prst="rect">
+            <a:avLst/>
+          </a:prstGeom>
+        </p:spPr>
+      </p:pic>
     </p:spTree>
     <p:extLst>
       <p:ext uri="{BB962C8B-B14F-4D97-AF65-F5344CB8AC3E}">
@@ -3760,7 +3790,7 @@
         </p:nvSpPr>
         <p:spPr>
           <a:xfrm>
-            <a:off x="6659120" y="301256"/>
+            <a:off x="6652144" y="403777"/>
             <a:ext cx="418465" cy="917944"/>
           </a:xfrm>
           <a:prstGeom prst="leftBrace">
@@ -3804,7 +3834,7 @@
         </p:nvSpPr>
         <p:spPr>
           <a:xfrm>
-            <a:off x="7228340" y="301256"/>
+            <a:off x="7228340" y="403777"/>
             <a:ext cx="4833374" cy="923330"/>
           </a:xfrm>
           <a:prstGeom prst="rect">
@@ -3954,7 +3984,7 @@
         </p:nvSpPr>
         <p:spPr>
           <a:xfrm>
-            <a:off x="6788767" y="4078872"/>
+            <a:off x="6809875" y="3951287"/>
             <a:ext cx="418465" cy="845927"/>
           </a:xfrm>
           <a:prstGeom prst="leftBrace">
@@ -3998,8 +4028,8 @@
         </p:nvSpPr>
         <p:spPr>
           <a:xfrm>
-            <a:off x="7501586" y="3897423"/>
-            <a:ext cx="3533596" cy="1477328"/>
+            <a:off x="7358626" y="4189584"/>
+            <a:ext cx="2251386" cy="369332"/>
           </a:xfrm>
           <a:prstGeom prst="rect">
             <a:avLst/>
@@ -4014,31 +4044,7 @@
           <a:p>
             <a:r>
               <a:rPr lang="en-US" dirty="0"/>
-              <a:t>Elicit priors</a:t>
-            </a:r>
-          </a:p>
-          <a:p>
-            <a:r>
-              <a:rPr lang="en-US" dirty="0"/>
-              <a:t>Randomize to control or info arms</a:t>
-            </a:r>
-          </a:p>
-          <a:p>
-            <a:r>
-              <a:rPr lang="en-US" dirty="0"/>
-              <a:t>Elicit posteriors</a:t>
-            </a:r>
-          </a:p>
-          <a:p>
-            <a:r>
-              <a:rPr lang="en-US" dirty="0"/>
-              <a:t>Measure intentions</a:t>
-            </a:r>
-          </a:p>
-          <a:p>
-            <a:r>
-              <a:rPr lang="en-US" dirty="0"/>
-              <a:t>Measure demographics, politics</a:t>
+              <a:t>Measure vaccination</a:t>
             </a:r>
           </a:p>
         </p:txBody>
